--- a/docs/comercial/AgroM-FitoLink-Capacidades.pptx
+++ b/docs/comercial/AgroM-FitoLink-Capacidades.pptx
@@ -4301,7 +4301,7 @@
                 <a:ea typeface="Georgia" pitchFamily="34" charset="-122"/>
                 <a:cs typeface="Georgia" pitchFamily="34" charset="-120"/>
               </a:rPr>
-              <a:t>Coordinación operativa — John Russo</a:t>
+              <a:t>Coordinación operativa — Jonh Yanga Núñez</a:t>
             </a:r>
             <a:endParaRPr lang="en-US" sz="1700" dirty="0"/>
           </a:p>

--- a/docs/comercial/AgroM-FitoLink-Capacidades.pptx
+++ b/docs/comercial/AgroM-FitoLink-Capacidades.pptx
@@ -2388,7 +2388,7 @@
                 <a:ea typeface="Georgia" pitchFamily="34" charset="-122"/>
                 <a:cs typeface="Georgia" pitchFamily="34" charset="-120"/>
               </a:rPr>
-              <a:t>INTELIGENCIA ARTIFICIAL</a:t>
+              <a:t>DETECCIÓN AUTOMÁTICA</a:t>
             </a:r>
             <a:endParaRPr lang="en-US" sz="1300" dirty="0"/>
           </a:p>
@@ -2430,7 +2430,7 @@
                 <a:ea typeface="Calibri" pitchFamily="34" charset="-122"/>
                 <a:cs typeface="Calibri" pitchFamily="34" charset="-120"/>
               </a:rPr>
-              <a:t>Un modelo entrenado con miles de patrones detecta caídas anómalas en cada parcela, cruzando datos del histórico de 5 años y del clima reciente.</a:t>
+              <a:t>Un clasificador analiza cada lectura nueva de cada parcela frente al baseline MODIS de la zona, el clima reciente y el histórico Sentinel-2 que tenemos de su parcela.</a:t>
             </a:r>
             <a:endParaRPr lang="en-US" sz="1100" dirty="0"/>
           </a:p>
@@ -2573,7 +2573,7 @@
                 <a:ea typeface="Calibri" pitchFamily="34" charset="-122"/>
                 <a:cs typeface="Calibri" pitchFamily="34" charset="-120"/>
               </a:rPr>
-              <a:t>Donde hace falta, un piloto certificado aplica solo en las zonas afectadas. Tasa variable basada en datos reales, no en cálculo a ojo.</a:t>
+              <a:t>Donde hace falta, un piloto certificado AESA aplica con dron DJI Agras según los datos satelitales y el estado real del cultivo, no a ojo.</a:t>
             </a:r>
             <a:endParaRPr lang="en-US" sz="1100" dirty="0"/>
           </a:p>
@@ -2716,7 +2716,7 @@
                 <a:ea typeface="Calibri" pitchFamily="34" charset="-122"/>
                 <a:cs typeface="Calibri" pitchFamily="34" charset="-120"/>
               </a:rPr>
-              <a:t>Cada aplicación queda registrada con firma electrónica y trazabilidad. Cumple normativa PAC sin papeleo añadido.</a:t>
+              <a:t>Cada aplicación queda registrada digitalmente con producto, dosis y condiciones. Información lista para incorporar al cuaderno de explotación según normativa PAC.</a:t>
             </a:r>
             <a:endParaRPr lang="en-US" sz="1100" dirty="0"/>
           </a:p>
